--- a/presentation/Diasoft-Divo-integration.pptx
+++ b/presentation/Diasoft-Divo-integration.pptx
@@ -123,7 +123,7 @@
   <p:extLst>
     <p:ext uri="{521415D9-36F7-43E2-AB2F-B90AF26B5E84}">
       <p14:sectionLst xmlns:p14="http://schemas.microsoft.com/office/powerpoint/2010/main">
-        <p14:section name="Задача" id="{f389681f-c419-e299-833c-fd66ac59677b}">
+        <p14:section name="Задача" id="{4fda279b-02fb-37b0-6405-ed57979d1c0f}">
           <p14:sldIdLst>
             <p14:sldId id="256"/>
             <p14:sldId id="257"/>
@@ -131,7 +131,7 @@
             <p14:sldId id="259"/>
           </p14:sldIdLst>
         </p14:section>
-        <p14:section name="Решение" id="{58f281ca-271b-92c4-f92c-9497e2083615}">
+        <p14:section name="Решение" id="{b2961ae9-7cfd-7b9a-c0e5-db729a86ac2d}">
           <p14:sldIdLst>
             <p14:sldId id="260"/>
             <p14:sldId id="261"/>
@@ -140,20 +140,20 @@
             <p14:sldId id="264"/>
           </p14:sldIdLst>
         </p14:section>
-        <p14:section name="API и данные" id="{8919f5e1-a7ad-ff13-c47f-0b6d29966c2e}">
+        <p14:section name="API и данные" id="{f942bce1-46fe-2889-4e6e-8b59248aa25d}">
           <p14:sldIdLst>
             <p14:sldId id="265"/>
             <p14:sldId id="266"/>
           </p14:sldIdLst>
         </p14:section>
-        <p14:section name="UX" id="{d83cee4e-a8e0-3a6b-8aba-023ba96d2840}">
+        <p14:section name="UX" id="{f0f9123a-db1c-518a-3346-102054b43b7f}">
           <p14:sldIdLst>
             <p14:sldId id="267"/>
             <p14:sldId id="268"/>
             <p14:sldId id="269"/>
           </p14:sldIdLst>
         </p14:section>
-        <p14:section name="Эффект" id="{39094b80-3326-39b1-52a5-b1c106847ce6}">
+        <p14:section name="Эффект" id="{869c4121-d966-5acd-4679-3d46349548eb}">
           <p14:sldIdLst>
             <p14:sldId id="270"/>
             <p14:sldId id="271"/>
@@ -3105,7 +3105,7 @@
                   <a:srgbClr val="FFFFFF"/>
                 </a:solidFill>
               </a:rPr>
-              <a:t>ФИО участника · вуз · курс</a:t>
+              <a:t>Саламон Михаил Иванович · НИУ ВШЭ · 1 курс, «Информационная безопасность»</a:t>
             </a:r>
             <a:endParaRPr lang="en-US" sz="1400" dirty="0"/>
           </a:p>
@@ -9039,12 +9039,19 @@
               <a:buNone/>
             </a:pPr>
             <a:r>
-              <a:rPr lang="en-US" sz="1400" b="1" dirty="0">
+              <a:rPr lang="en-US" sz="1400" b="1" u="sng" dirty="0">
                 <a:solidFill>
                   <a:srgbClr val="FFFFFF"/>
                 </a:solidFill>
-              </a:rPr>
-              <a:t>github.com/&lt;пользователь&gt;/&lt;репозиторий&gt;</a:t>
+                <a:hlinkClick r:id="rId1" invalidUrl="" action="" tgtFrame="" tooltip="" history="1" highlightClick="0" endSnd="0">
+                  <a:extLst>
+                    <a:ext uri="{A12FA001-AC4F-418D-AE19-62706E023703}">
+                      <ahyp:hlinkClr xmlns:ahyp="http://schemas.microsoft.com/office/drawing/2018/hyperlinkcolor" val="tx"/>
+                    </a:ext>
+                  </a:extLst>
+                </a:hlinkClick>
+              </a:rPr>
+              <a:t>github.com/schierketsu/rshb</a:t>
             </a:r>
             <a:endParaRPr lang="en-US" sz="1400" dirty="0"/>
           </a:p>
@@ -9064,12 +9071,19 @@
               <a:buNone/>
             </a:pPr>
             <a:r>
-              <a:rPr lang="en-US" sz="1400" b="1" dirty="0">
+              <a:rPr lang="en-US" sz="1400" b="1" u="sng" dirty="0">
                 <a:solidFill>
                   <a:srgbClr val="FFFFFF"/>
                 </a:solidFill>
-              </a:rPr>
-              <a:t>ссылка на файл Figma</a:t>
+                <a:hlinkClick r:id="rId2" invalidUrl="" action="" tgtFrame="" tooltip="" history="1" highlightClick="0" endSnd="0">
+                  <a:extLst>
+                    <a:ext uri="{A12FA001-AC4F-418D-AE19-62706E023703}">
+                      <ahyp:hlinkClr xmlns:ahyp="http://schemas.microsoft.com/office/drawing/2018/hyperlinkcolor" val="tx"/>
+                    </a:ext>
+                  </a:extLst>
+                </a:hlinkClick>
+              </a:rPr>
+              <a:t>clck.ru/3WhW9k</a:t>
             </a:r>
             <a:endParaRPr lang="en-US" sz="1400" dirty="0"/>
           </a:p>
@@ -9105,7 +9119,7 @@
                   <a:srgbClr val="FFFFFF"/>
                 </a:solidFill>
               </a:rPr>
-              <a:t>ФИО участника · вуз · курс</a:t>
+              <a:t>Саламон Михаил Иванович · НИУ ВШЭ · 1 курс, «Информационная безопасность»</a:t>
             </a:r>
             <a:endParaRPr lang="en-US" sz="1400" dirty="0"/>
           </a:p>
